--- a/EdgeGuard_AI.pptx
+++ b/EdgeGuard_AI.pptx
@@ -744,7 +744,7 @@
           <a:p>
             <a:fld id="{5BCAD085-E8A6-8845-BD4E-CB4CCA059FC4}" type="datetimeFigureOut">
               <a:rPr lang="en-US" smtClean="0"/>
-              <a:t>7/5/2026</a:t>
+              <a:t>06-Aug-26</a:t>
             </a:fld>
             <a:endParaRPr lang="en-US"/>
           </a:p>
@@ -907,7 +907,7 @@
           <a:p>
             <a:fld id="{5BCAD085-E8A6-8845-BD4E-CB4CCA059FC4}" type="datetimeFigureOut">
               <a:rPr lang="en-US" smtClean="0"/>
-              <a:t>7/5/2026</a:t>
+              <a:t>06-Aug-26</a:t>
             </a:fld>
             <a:endParaRPr lang="en-US"/>
           </a:p>
@@ -1080,7 +1080,7 @@
           <a:p>
             <a:fld id="{5BCAD085-E8A6-8845-BD4E-CB4CCA059FC4}" type="datetimeFigureOut">
               <a:rPr lang="en-US" smtClean="0"/>
-              <a:t>7/5/2026</a:t>
+              <a:t>06-Aug-26</a:t>
             </a:fld>
             <a:endParaRPr lang="en-US"/>
           </a:p>
@@ -1243,7 +1243,7 @@
           <a:p>
             <a:fld id="{5BCAD085-E8A6-8845-BD4E-CB4CCA059FC4}" type="datetimeFigureOut">
               <a:rPr lang="en-US" smtClean="0"/>
-              <a:t>7/5/2026</a:t>
+              <a:t>06-Aug-26</a:t>
             </a:fld>
             <a:endParaRPr lang="en-US"/>
           </a:p>
@@ -1483,7 +1483,7 @@
           <a:p>
             <a:fld id="{5BCAD085-E8A6-8845-BD4E-CB4CCA059FC4}" type="datetimeFigureOut">
               <a:rPr lang="en-US" smtClean="0"/>
-              <a:t>7/5/2026</a:t>
+              <a:t>06-Aug-26</a:t>
             </a:fld>
             <a:endParaRPr lang="en-US"/>
           </a:p>
@@ -1763,7 +1763,7 @@
           <a:p>
             <a:fld id="{5BCAD085-E8A6-8845-BD4E-CB4CCA059FC4}" type="datetimeFigureOut">
               <a:rPr lang="en-US" smtClean="0"/>
-              <a:t>7/5/2026</a:t>
+              <a:t>06-Aug-26</a:t>
             </a:fld>
             <a:endParaRPr lang="en-US"/>
           </a:p>
@@ -2173,7 +2173,7 @@
           <a:p>
             <a:fld id="{5BCAD085-E8A6-8845-BD4E-CB4CCA059FC4}" type="datetimeFigureOut">
               <a:rPr lang="en-US" smtClean="0"/>
-              <a:t>7/5/2026</a:t>
+              <a:t>06-Aug-26</a:t>
             </a:fld>
             <a:endParaRPr lang="en-US"/>
           </a:p>
@@ -2285,7 +2285,7 @@
           <a:p>
             <a:fld id="{5BCAD085-E8A6-8845-BD4E-CB4CCA059FC4}" type="datetimeFigureOut">
               <a:rPr lang="en-US" smtClean="0"/>
-              <a:t>7/5/2026</a:t>
+              <a:t>06-Aug-26</a:t>
             </a:fld>
             <a:endParaRPr lang="en-US"/>
           </a:p>
@@ -2375,7 +2375,7 @@
           <a:p>
             <a:fld id="{5BCAD085-E8A6-8845-BD4E-CB4CCA059FC4}" type="datetimeFigureOut">
               <a:rPr lang="en-US" smtClean="0"/>
-              <a:t>7/5/2026</a:t>
+              <a:t>06-Aug-26</a:t>
             </a:fld>
             <a:endParaRPr lang="en-US"/>
           </a:p>
@@ -2645,7 +2645,7 @@
           <a:p>
             <a:fld id="{5BCAD085-E8A6-8845-BD4E-CB4CCA059FC4}" type="datetimeFigureOut">
               <a:rPr lang="en-US" smtClean="0"/>
-              <a:t>7/5/2026</a:t>
+              <a:t>06-Aug-26</a:t>
             </a:fld>
             <a:endParaRPr lang="en-US"/>
           </a:p>
@@ -2892,7 +2892,7 @@
           <a:p>
             <a:fld id="{5BCAD085-E8A6-8845-BD4E-CB4CCA059FC4}" type="datetimeFigureOut">
               <a:rPr lang="en-US" smtClean="0"/>
-              <a:t>7/5/2026</a:t>
+              <a:t>06-Aug-26</a:t>
             </a:fld>
             <a:endParaRPr lang="en-US"/>
           </a:p>
@@ -3098,7 +3098,7 @@
           <a:p>
             <a:fld id="{5BCAD085-E8A6-8845-BD4E-CB4CCA059FC4}" type="datetimeFigureOut">
               <a:rPr lang="en-US" smtClean="0"/>
-              <a:t>7/5/2026</a:t>
+              <a:t>06-Aug-26</a:t>
             </a:fld>
             <a:endParaRPr lang="en-US"/>
           </a:p>
@@ -3523,40 +3523,6 @@
       </p:sp>
       <p:sp>
         <p:nvSpPr>
-          <p:cNvPr id="1048585" name="TextBox 2"/>
-          <p:cNvSpPr txBox="1"/>
-          <p:nvPr/>
-        </p:nvSpPr>
-        <p:spPr>
-          <a:xfrm>
-            <a:off x="685800" y="1375000"/>
-            <a:ext cx="10820400" cy="396240"/>
-          </a:xfrm>
-          <a:prstGeom prst="rect">
-            <a:avLst/>
-          </a:prstGeom>
-          <a:noFill/>
-        </p:spPr>
-        <p:txBody>
-          <a:bodyPr wrap="square">
-            <a:spAutoFit/>
-          </a:bodyPr>
-          <a:lstStyle/>
-          <a:p>
-            <a:r>
-              <a:rPr sz="2000" b="1">
-                <a:solidFill>
-                  <a:srgbClr val="963D31"/>
-                </a:solidFill>
-                <a:latin typeface="Arial"/>
-              </a:rPr>
-              <a:t>TATA INNOVENT 2026</a:t>
-            </a:r>
-          </a:p>
-        </p:txBody>
-      </p:sp>
-      <p:sp>
-        <p:nvSpPr>
           <p:cNvPr id="1048586" name="TextBox 3"/>
           <p:cNvSpPr txBox="1"/>
           <p:nvPr/>
@@ -3674,146 +3640,6 @@
           <a:p>
             <a:pPr algn="ctr"/>
             <a:endParaRPr/>
-          </a:p>
-        </p:txBody>
-      </p:sp>
-      <p:sp>
-        <p:nvSpPr>
-          <p:cNvPr id="1048589" name="TextBox 6"/>
-          <p:cNvSpPr txBox="1"/>
-          <p:nvPr/>
-        </p:nvSpPr>
-        <p:spPr>
-          <a:xfrm>
-            <a:off x="685800" y="4433000"/>
-            <a:ext cx="10820400" cy="447040"/>
-          </a:xfrm>
-          <a:prstGeom prst="rect">
-            <a:avLst/>
-          </a:prstGeom>
-          <a:noFill/>
-        </p:spPr>
-        <p:txBody>
-          <a:bodyPr wrap="square">
-            <a:spAutoFit/>
-          </a:bodyPr>
-          <a:lstStyle/>
-          <a:p>
-            <a:r>
-              <a:rPr sz="2400" b="1">
-                <a:solidFill>
-                  <a:srgbClr val="3A2E2A"/>
-                </a:solidFill>
-                <a:latin typeface="Arial"/>
-              </a:rPr>
-              <a:t>Team Forge V</a:t>
-            </a:r>
-          </a:p>
-        </p:txBody>
-      </p:sp>
-      <p:sp>
-        <p:nvSpPr>
-          <p:cNvPr id="1048590" name="TextBox 7"/>
-          <p:cNvSpPr txBox="1"/>
-          <p:nvPr/>
-        </p:nvSpPr>
-        <p:spPr>
-          <a:xfrm>
-            <a:off x="685800" y="5153000"/>
-            <a:ext cx="10820400" cy="330000"/>
-          </a:xfrm>
-          <a:prstGeom prst="rect">
-            <a:avLst/>
-          </a:prstGeom>
-          <a:noFill/>
-        </p:spPr>
-        <p:txBody>
-          <a:bodyPr wrap="square">
-            <a:spAutoFit/>
-          </a:bodyPr>
-          <a:lstStyle/>
-          <a:p>
-            <a:r>
-              <a:rPr sz="1700" b="1">
-                <a:solidFill>
-                  <a:srgbClr val="3A2E2A"/>
-                </a:solidFill>
-                <a:latin typeface="Calibri"/>
-              </a:rPr>
-              <a:t>Suresh Kumar</a:t>
-            </a:r>
-            <a:r>
-              <a:rPr sz="1700" b="0">
-                <a:solidFill>
-                  <a:srgbClr val="963D31"/>
-                </a:solidFill>
-                <a:latin typeface="Calibri"/>
-              </a:rPr>
-              <a:t>  •  </a:t>
-            </a:r>
-            <a:r>
-              <a:rPr sz="1700" b="1">
-                <a:solidFill>
-                  <a:srgbClr val="3A2E2A"/>
-                </a:solidFill>
-                <a:latin typeface="Calibri"/>
-              </a:rPr>
-              <a:t>Nitin Kalinga</a:t>
-            </a:r>
-            <a:r>
-              <a:rPr sz="1700" b="0">
-                <a:solidFill>
-                  <a:srgbClr val="963D31"/>
-                </a:solidFill>
-                <a:latin typeface="Calibri"/>
-              </a:rPr>
-              <a:t>  •  </a:t>
-            </a:r>
-            <a:r>
-              <a:rPr sz="1700" b="1">
-                <a:solidFill>
-                  <a:srgbClr val="3A2E2A"/>
-                </a:solidFill>
-                <a:latin typeface="Calibri"/>
-              </a:rPr>
-              <a:t>Jonathan Immanuel Kennedy</a:t>
-            </a:r>
-            <a:r>
-              <a:rPr sz="1700" b="0">
-                <a:solidFill>
-                  <a:srgbClr val="963D31"/>
-                </a:solidFill>
-                <a:latin typeface="Calibri"/>
-              </a:rPr>
-              <a:t>  •  </a:t>
-            </a:r>
-            <a:r>
-              <a:rPr sz="1700" b="1">
-                <a:solidFill>
-                  <a:srgbClr val="3A2E2A"/>
-                </a:solidFill>
-                <a:latin typeface="Calibri"/>
-              </a:rPr>
-              <a:t>Balaji Kumar</a:t>
-            </a:r>
-            <a:r>
-              <a:rPr sz="1700" b="0">
-                <a:solidFill>
-                  <a:srgbClr val="963D31"/>
-                </a:solidFill>
-                <a:latin typeface="Calibri"/>
-              </a:rPr>
-              <a:t>  •  </a:t>
-            </a:r>
-            <a:r>
-              <a:rPr sz="1700" b="1">
-                <a:solidFill>
-                  <a:srgbClr val="3A2E2A"/>
-                </a:solidFill>
-                <a:latin typeface="Calibri"/>
-              </a:rPr>
-              <a:t>Akshan</a:t>
-            </a:r>
           </a:p>
         </p:txBody>
       </p:sp>
